--- a/Docs/pitch-deck.pptx
+++ b/Docs/pitch-deck.pptx
@@ -538,7 +538,7 @@
           </a:p>
           <a:p>
             <a:r>
-              <a:t>Evidence date: 9 September 2026. No population accuracy or competition score is inferred from integration checks.</a:t>
+              <a:t>Evidence date: 11 September 2026. No population accuracy or competition score is inferred from integration checks.</a:t>
             </a:r>
           </a:p>
         </p:txBody>
@@ -619,18 +619,18 @@
           <a:p/>
           <a:p>
             <a:r>
-              <a:t>The measurement story needs precision. One desktop observation after graph cleanup recorded nine point six milliseconds for warm face inference and ninety-two milliseconds for capture and protection. A separate first live model step displayed three thousand and twenty-nine milliseconds. These are single observations in the embedded Chromium browser on an Apple M1 Pro with sixteen gigabytes of system memory. They are not a distribution, a mobile benchmark or end-to-end latency. Thirty-seven recorded Node tests passed, covering contracts and error paths, with provider doubles clearly separated from the live model workflow. The original two-hundred-millisecond full-flow target is failed. The next work is repeated cold and warm profiling, actual full-task timing and resource measurements, not rebranding the fastest component as the whole pipeline.</a:t>
+              <a:t>The measurement story needs precision. A scale matrix ran the packaged face model over one synthetic image at fourteen sizes from forty-eight to three hundred and twenty pixels: every size returned one detection, between nine and twenty milliseconds. Capture and protection measured ninety-two to one hundred and eight milliseconds across the recorded desktop, initial and narrow-viewport captures. An integrated synthetic observation desk completed a local draft in thirty point five seconds including the human confirmation step, and two further runs stopped correctly on expiry and on user request. A separate first live model step displayed three thousand and twenty-nine milliseconds. One result went against us and it is on the slide: on one hundred frozen synthetic screens, local OCR and the PII model retained exact annotated personal data on fifty-eight of them. That is why text export stays disabled and the outbound schema stays structural. These are local observations on an Apple M1 Pro with sixteen gigabytes of system memory, not distributions or a mobile benchmark. Seventy-five recorded Node tests pass. The original two-hundred-millisecond full-flow target is failed, and we are not rebranding the fastest component as the whole pipeline.</a:t>
             </a:r>
           </a:p>
           <a:p/>
           <a:p>
             <a:r>
-              <a:t>Sources: Benchmarks/results/prototype-v01-browser.json; Benchmarks/results/prototype-unit-tests.txt</a:t>
-            </a:r>
-          </a:p>
-          <a:p>
-            <a:r>
-              <a:t>Evidence date: 9 September 2026. No population accuracy or competition score is inferred from integration checks.</a:t>
+              <a:t>Sources: Benchmarks/results/operations-v01/summary.json; Benchmarks/results/operations-v01/face-scale-v01.json; Benchmarks/results/webpii-text-v01-summary.json; Benchmarks/results/prototype-unit-tests.txt</a:t>
+            </a:r>
+          </a:p>
+          <a:p>
+            <a:r>
+              <a:t>Evidence date: 11 September 2026. No population accuracy or competition score is inferred from integration checks.</a:t>
             </a:r>
           </a:p>
         </p:txBody>
@@ -722,7 +722,7 @@
           </a:p>
           <a:p>
             <a:r>
-              <a:t>Evidence date: 9 September 2026. No population accuracy or competition score is inferred from integration checks.</a:t>
+              <a:t>Evidence date: 11 September 2026. No population accuracy or competition score is inferred from integration checks.</a:t>
             </a:r>
           </a:p>
         </p:txBody>
@@ -803,7 +803,7 @@
           <a:p/>
           <a:p>
             <a:r>
-              <a:t>The conservative reconstruction is a deliberate trade-off. It limits what enters the server request, but useful text and images can disappear as well. A face-only model may miss small or occluded faces, and it cannot recognize textual PII. The current workflow is restricted, while native Chrome and Firefox extension execution remains a separate verification gate. Next, freeze labeled unseen pages and compare DOM-only, face-only, detected masks and conservative reconstruction. Measure preservation as well as removal. Then profile worker execution and cold loading. Any broader vocabulary or image context should be admitted only after its privacy and task utility are evaluated.</a:t>
+              <a:t>Two risks are measured rather than assumed. First, the conservative reconstruction is a deliberate trade-off. It limits what enters the server request, but useful text and images can disappear as well. A face-only model may miss small or occluded faces, and it cannot recognize textual PII. The current workflow is restricted, while native Chrome and Firefox extension execution remains a separate verification gate. Next, freeze labeled unseen pages and compare DOM-only, face-only, detected masks and conservative reconstruction. Measure preservation as well as removal. Second, and more serious: on one hundred frozen synthetic screens, local OCR and the PII model retained exact annotated personal data on fifty-eight of them. That is a failed privacy result, and it is why text export remains disabled and the outbound request schema stays structural rather than carrying reconstructed text. Then profile worker execution and cold loading. Any broader vocabulary or image context should be admitted only after its privacy and task utility are evaluated.</a:t>
             </a:r>
           </a:p>
           <a:p/>
@@ -814,7 +814,7 @@
           </a:p>
           <a:p>
             <a:r>
-              <a:t>Evidence date: 9 September 2026. No population accuracy or competition score is inferred from integration checks.</a:t>
+              <a:t>Evidence date: 11 September 2026. No population accuracy or competition score is inferred from integration checks.</a:t>
             </a:r>
           </a:p>
         </p:txBody>
@@ -906,7 +906,7 @@
           </a:p>
           <a:p>
             <a:r>
-              <a:t>Evidence date: 9 September 2026. No population accuracy or competition score is inferred from integration checks.</a:t>
+              <a:t>Evidence date: 11 September 2026. No population accuracy or competition score is inferred from integration checks.</a:t>
             </a:r>
           </a:p>
         </p:txBody>
@@ -998,7 +998,7 @@
           </a:p>
           <a:p>
             <a:r>
-              <a:t>Evidence date: 9 September 2026. No population accuracy or competition score is inferred from integration checks.</a:t>
+              <a:t>Evidence date: 11 September 2026. No population accuracy or competition score is inferred from integration checks.</a:t>
             </a:r>
           </a:p>
         </p:txBody>
@@ -1085,12 +1085,12 @@
           <a:p/>
           <a:p>
             <a:r>
-              <a:t>Sources: Wiki/source-index.md; Benchmarks/results/prototype-v01-browser.json; Benchmarks/results/prototype-unit-tests.txt</a:t>
-            </a:r>
-          </a:p>
-          <a:p>
-            <a:r>
-              <a:t>Evidence date: 9 September 2026. No population accuracy or competition score is inferred from integration checks.</a:t>
+              <a:t>Sources: Wiki/source-index.md; Benchmarks/results/operations-v01/summary.json; Benchmarks/results/operations-v01/face-scale-v01.json; Benchmarks/results/webpii-text-v01-summary.json; Benchmarks/results/prototype-unit-tests.txt</a:t>
+            </a:r>
+          </a:p>
+          <a:p>
+            <a:r>
+              <a:t>Evidence date: 11 September 2026. No population accuracy or competition score is inferred from integration checks.</a:t>
             </a:r>
           </a:p>
         </p:txBody>
@@ -1182,7 +1182,7 @@
           </a:p>
           <a:p>
             <a:r>
-              <a:t>Evidence date: 9 September 2026. No population accuracy or competition score is inferred from integration checks.</a:t>
+              <a:t>Evidence date: 11 September 2026. No population accuracy or competition score is inferred from integration checks.</a:t>
             </a:r>
           </a:p>
         </p:txBody>
@@ -1274,7 +1274,7 @@
           </a:p>
           <a:p>
             <a:r>
-              <a:t>Evidence date: 9 September 2026. No population accuracy or competition score is inferred from integration checks.</a:t>
+              <a:t>Evidence date: 11 September 2026. No population accuracy or competition score is inferred from integration checks.</a:t>
             </a:r>
           </a:p>
         </p:txBody>
@@ -1366,7 +1366,7 @@
           </a:p>
           <a:p>
             <a:r>
-              <a:t>Evidence date: 9 September 2026. No population accuracy or competition score is inferred from integration checks.</a:t>
+              <a:t>Evidence date: 11 September 2026. No population accuracy or competition score is inferred from integration checks.</a:t>
             </a:r>
           </a:p>
         </p:txBody>
@@ -1453,12 +1453,12 @@
           <a:p/>
           <a:p>
             <a:r>
-              <a:t>Sources: Benchmarks/results/prototype-v01-browser.json; Benchmarks/results/prototype-unit-tests.txt; Prototype/models/manifest.json</a:t>
-            </a:r>
-          </a:p>
-          <a:p>
-            <a:r>
-              <a:t>Evidence date: 9 September 2026. No population accuracy or competition score is inferred from integration checks.</a:t>
+              <a:t>Sources: Benchmarks/results/operations-v01/summary.json; Benchmarks/results/operations-v01/face-scale-v01.json; Benchmarks/results/webpii-text-v01-summary.json; Benchmarks/results/prototype-unit-tests.txt; Prototype/models/manifest.json</a:t>
+            </a:r>
+          </a:p>
+          <a:p>
+            <a:r>
+              <a:t>Evidence date: 11 September 2026. No population accuracy or competition score is inferred from integration checks.</a:t>
             </a:r>
           </a:p>
         </p:txBody>
@@ -1550,7 +1550,7 @@
           </a:p>
           <a:p>
             <a:r>
-              <a:t>Evidence date: 9 September 2026. No population accuracy or competition score is inferred from integration checks.</a:t>
+              <a:t>Evidence date: 11 September 2026. No population accuracy or competition score is inferred from integration checks.</a:t>
             </a:r>
           </a:p>
         </p:txBody>
@@ -1637,12 +1637,12 @@
           <a:p/>
           <a:p>
             <a:r>
-              <a:t>Sources: Prototype/README.md; Benchmarks/results/prototype-v01-browser.json; Benchmarks/results/prototype-unit-tests.txt</a:t>
-            </a:r>
-          </a:p>
-          <a:p>
-            <a:r>
-              <a:t>Evidence date: 9 September 2026. No population accuracy or competition score is inferred from integration checks.</a:t>
+              <a:t>Sources: Prototype/README.md; Benchmarks/results/operations-v01/summary.json; Benchmarks/results/operations-v01/face-scale-v01.json; Benchmarks/results/webpii-text-v01-summary.json; Benchmarks/results/prototype-unit-tests.txt</a:t>
+            </a:r>
+          </a:p>
+          <a:p>
+            <a:r>
+              <a:t>Evidence date: 11 September 2026. No population accuracy or competition score is inferred from integration checks.</a:t>
             </a:r>
           </a:p>
         </p:txBody>
@@ -1729,12 +1729,12 @@
           <a:p/>
           <a:p>
             <a:r>
-              <a:t>Sources: Benchmarks/results/prototype-v01-browser.json; Benchmarks/results/prototype-unit-tests.txt; https://arxiv.org/abs/2504.11281</a:t>
-            </a:r>
-          </a:p>
-          <a:p>
-            <a:r>
-              <a:t>Evidence date: 9 September 2026. No population accuracy or competition score is inferred from integration checks.</a:t>
+              <a:t>Sources: Benchmarks/results/operations-v01/summary.json; Benchmarks/results/operations-v01/face-scale-v01.json; Benchmarks/results/webpii-text-v01-summary.json; Benchmarks/results/prototype-unit-tests.txt; https://arxiv.org/abs/2504.11281</a:t>
+            </a:r>
+          </a:p>
+          <a:p>
+            <a:r>
+              <a:t>Evidence date: 11 September 2026. No population accuracy or competition score is inferred from integration checks.</a:t>
             </a:r>
           </a:p>
         </p:txBody>
@@ -1821,12 +1821,12 @@
           <a:p/>
           <a:p>
             <a:r>
-              <a:t>Sources: Benchmarks/results/prototype-v01-browser.json; Benchmarks/results/prototype-unit-tests.txt; Prototype/README.md</a:t>
-            </a:r>
-          </a:p>
-          <a:p>
-            <a:r>
-              <a:t>Evidence date: 9 September 2026. No population accuracy or competition score is inferred from integration checks.</a:t>
+              <a:t>Sources: Benchmarks/results/operations-v01/summary.json; Benchmarks/results/operations-v01/face-scale-v01.json; Benchmarks/results/webpii-text-v01-summary.json; Benchmarks/results/prototype-unit-tests.txt; Prototype/README.md</a:t>
+            </a:r>
+          </a:p>
+          <a:p>
+            <a:r>
+              <a:t>Evidence date: 11 September 2026. No population accuracy or competition score is inferred from integration checks.</a:t>
             </a:r>
           </a:p>
         </p:txBody>
@@ -5081,7 +5081,7 @@
               </a:defRPr>
             </a:pPr>
             <a:r>
-              <a:t>RV UNIVERSITY · ENGINEERING CANDIDATE v0.1 · 09 SEP 2026</a:t>
+              <a:t>RV UNIVERSITY · ENGINEERING CANDIDATE v0.1 · 11 SEP 2026</a:t>
             </a:r>
           </a:p>
         </p:txBody>
@@ -5584,7 +5584,7 @@
               </a:defRPr>
             </a:pPr>
             <a:r>
-              <a:t>RV UNIVERSITY · ENGINEERING CANDIDATE v0.1 · 09 SEP 2026</a:t>
+              <a:t>RV UNIVERSITY · ENGINEERING CANDIDATE v0.1 · 11 SEP 2026</a:t>
             </a:r>
           </a:p>
         </p:txBody>
@@ -5662,7 +5662,7 @@
               </a:defRPr>
             </a:pPr>
             <a:r>
-              <a:t>9.6 ms</a:t>
+              <a:t>9–20 ms</a:t>
             </a:r>
           </a:p>
         </p:txBody>
@@ -5701,7 +5701,7 @@
               </a:defRPr>
             </a:pPr>
             <a:r>
-              <a:t>Warm face inference</a:t>
+              <a:t>Face inference, 14 input sizes</a:t>
             </a:r>
           </a:p>
         </p:txBody>
@@ -5775,7 +5775,7 @@
               </a:defRPr>
             </a:pPr>
             <a:r>
-              <a:t>92 ms</a:t>
+              <a:t>92–108 ms</a:t>
             </a:r>
           </a:p>
         </p:txBody>
@@ -6001,7 +6001,7 @@
               </a:defRPr>
             </a:pPr>
             <a:r>
-              <a:t>37 recorded Node tests pass. The &lt;200 ms full-flow target does not pass.</a:t>
+              <a:t>75 recorded Node tests pass. The &lt;200 ms full-flow target does not pass.</a:t>
             </a:r>
           </a:p>
         </p:txBody>
@@ -6040,7 +6040,7 @@
               </a:defRPr>
             </a:pPr>
             <a:r>
-              <a:t>Observation date: 9 Sep 2026 · test doubles are unit-test scope; actual Qwen workflow is separate evidence.</a:t>
+              <a:t>Face-inference range: 11 Sep 2026 face-scale matrix. Capture and model figures: 9 Sep 2026 v0.1 record. Test doubles are unit-test scope; the Qwen workflow is separate evidence.</a:t>
             </a:r>
           </a:p>
         </p:txBody>
@@ -6296,7 +6296,7 @@
               </a:defRPr>
             </a:pPr>
             <a:r>
-              <a:t>RV UNIVERSITY · ENGINEERING CANDIDATE v0.1 · 09 SEP 2026</a:t>
+              <a:t>RV UNIVERSITY · ENGINEERING CANDIDATE v0.1 · 11 SEP 2026</a:t>
             </a:r>
           </a:p>
         </p:txBody>
@@ -7089,7 +7089,7 @@
               </a:defRPr>
             </a:pPr>
             <a:r>
-              <a:t>RV UNIVERSITY · ENGINEERING CANDIDATE v0.1 · 09 SEP 2026</a:t>
+              <a:t>RV UNIVERSITY · ENGINEERING CANDIDATE v0.1 · 11 SEP 2026</a:t>
             </a:r>
           </a:p>
         </p:txBody>
@@ -7999,7 +7999,7 @@
               </a:defRPr>
             </a:pPr>
             <a:r>
-              <a:t>RV UNIVERSITY · ENGINEERING CANDIDATE v0.1 · 09 SEP 2026</a:t>
+              <a:t>RV UNIVERSITY · ENGINEERING CANDIDATE v0.1 · 11 SEP 2026</a:t>
             </a:r>
           </a:p>
         </p:txBody>
@@ -8768,7 +8768,7 @@
               </a:defRPr>
             </a:pPr>
             <a:r>
-              <a:t>RV UNIVERSITY · ENGINEERING CANDIDATE v0.1 · 09 SEP 2026</a:t>
+              <a:t>RV UNIVERSITY · ENGINEERING CANDIDATE v0.1 · 11 SEP 2026</a:t>
             </a:r>
           </a:p>
         </p:txBody>
@@ -9878,7 +9878,7 @@
               </a:defRPr>
             </a:pPr>
             <a:r>
-              <a:t>RV UNIVERSITY · ENGINEERING CANDIDATE v0.1 · 09 SEP 2026</a:t>
+              <a:t>RV UNIVERSITY · ENGINEERING CANDIDATE v0.1 · 11 SEP 2026</a:t>
             </a:r>
           </a:p>
         </p:txBody>
@@ -10333,7 +10333,7 @@
               </a:defRPr>
             </a:pPr>
             <a:r>
-              <a:t>RV UNIVERSITY · ENGINEERING CANDIDATE v0.1 · 09 SEP 2026</a:t>
+              <a:t>RV UNIVERSITY · ENGINEERING CANDIDATE v0.1 · 11 SEP 2026</a:t>
             </a:r>
           </a:p>
         </p:txBody>
@@ -11033,7 +11033,7 @@
               </a:defRPr>
             </a:pPr>
             <a:r>
-              <a:t>RV UNIVERSITY · ENGINEERING CANDIDATE v0.1 · 09 SEP 2026</a:t>
+              <a:t>RV UNIVERSITY · ENGINEERING CANDIDATE v0.1 · 11 SEP 2026</a:t>
             </a:r>
           </a:p>
         </p:txBody>
@@ -11975,7 +11975,7 @@
               </a:defRPr>
             </a:pPr>
             <a:r>
-              <a:t>RV UNIVERSITY · ENGINEERING CANDIDATE v0.1 · 09 SEP 2026</a:t>
+              <a:t>RV UNIVERSITY · ENGINEERING CANDIDATE v0.1 · 11 SEP 2026</a:t>
             </a:r>
           </a:p>
         </p:txBody>
@@ -13043,7 +13043,7 @@
               </a:defRPr>
             </a:pPr>
             <a:r>
-              <a:t>RV UNIVERSITY · ENGINEERING CANDIDATE v0.1 · 09 SEP 2026</a:t>
+              <a:t>RV UNIVERSITY · ENGINEERING CANDIDATE v0.1 · 11 SEP 2026</a:t>
             </a:r>
           </a:p>
         </p:txBody>
@@ -13528,7 +13528,7 @@
               </a:defRPr>
             </a:pPr>
             <a:r>
-              <a:t>RV UNIVERSITY · ENGINEERING CANDIDATE v0.1 · 09 SEP 2026</a:t>
+              <a:t>RV UNIVERSITY · ENGINEERING CANDIDATE v0.1 · 11 SEP 2026</a:t>
             </a:r>
           </a:p>
         </p:txBody>
@@ -14393,7 +14393,7 @@
               </a:defRPr>
             </a:pPr>
             <a:r>
-              <a:t>RV UNIVERSITY · ENGINEERING CANDIDATE v0.1 · 09 SEP 2026</a:t>
+              <a:t>RV UNIVERSITY · ENGINEERING CANDIDATE v0.1 · 11 SEP 2026</a:t>
             </a:r>
           </a:p>
         </p:txBody>
@@ -15022,7 +15022,7 @@
               </a:defRPr>
             </a:pPr>
             <a:r>
-              <a:t>RV UNIVERSITY · ENGINEERING CANDIDATE v0.1 · 09 SEP 2026</a:t>
+              <a:t>RV UNIVERSITY · ENGINEERING CANDIDATE v0.1 · 11 SEP 2026</a:t>
             </a:r>
           </a:p>
         </p:txBody>
@@ -16008,7 +16008,7 @@
               </a:defRPr>
             </a:pPr>
             <a:r>
-              <a:t>RV UNIVERSITY · ENGINEERING CANDIDATE v0.1 · 09 SEP 2026</a:t>
+              <a:t>RV UNIVERSITY · ENGINEERING CANDIDATE v0.1 · 11 SEP 2026</a:t>
             </a:r>
           </a:p>
         </p:txBody>
